--- a/builder/assets/reference-pages/hr-workforce-reconciliation.pptx
+++ b/builder/assets/reference-pages/hr-workforce-reconciliation.pptx
@@ -1097,7 +1097,7 @@
                   <a:srgbClr val="15375F"/>
                 </a:solidFill>
               </a:rPr>
-              <a:t>全年净增 42 人，但招聘 218 人、离职 176 人，替换性招聘占比 81%</a:t>
+              <a:t>Net increase for the year 42 people, but recruiting 218 people, resignation 176 People, proportion of replacement recruitment 81%</a:t>
             </a:r>
           </a:p>
         </p:txBody>
@@ -1275,7 +1275,7 @@
                   <a:srgbClr val="E8872D"/>
                 </a:solidFill>
               </a:rPr>
-              <a:t>⚠ 年终奖后</a:t>
+              <a:t>⚠ After year-end bonus</a:t>
             </a:r>
           </a:p>
         </p:txBody>
@@ -1325,7 +1325,7 @@
                   <a:srgbClr val="E8872D"/>
                 </a:solidFill>
               </a:rPr>
-              <a:t>⚠ 组织调整</a:t>
+              <a:t>⚠ organizational adjustment</a:t>
             </a:r>
           </a:p>
         </p:txBody>
@@ -1375,7 +1375,7 @@
                   <a:srgbClr val="E8872D"/>
                 </a:solidFill>
               </a:rPr>
-              <a:t>⚠ 业务淡季</a:t>
+              <a:t>⚠ Off-season business</a:t>
             </a:r>
           </a:p>
         </p:txBody>
@@ -2107,7 +2107,7 @@
                   <a:srgbClr val="15375F"/>
                 </a:solidFill>
               </a:rPr>
-              <a:t>橙：离职率｜蓝：招聘完成率</a:t>
+              <a:t>Orange: turnover rate｜Blue: Recruitment completion rate</a:t>
             </a:r>
           </a:p>
         </p:txBody>
@@ -2157,7 +2157,7 @@
                   <a:srgbClr val="697386"/>
                 </a:solidFill>
               </a:rPr>
-              <a:t>对账顺序：期初 / 入 / 离 / 调 / 期末 / 净增</a:t>
+              <a:t>Reconciliation sequence: beginning of period / enter / away from / tune / End of term / net increase</a:t>
             </a:r>
           </a:p>
         </p:txBody>
@@ -2207,7 +2207,7 @@
                   <a:srgbClr val="15375F"/>
                 </a:solidFill>
               </a:rPr>
-              <a:t>1月</a:t>
+              <a:t>1month</a:t>
             </a:r>
           </a:p>
         </p:txBody>
@@ -2577,7 +2577,7 @@
                   <a:srgbClr val="E8872D"/>
                 </a:solidFill>
               </a:rPr>
-              <a:t>编差 -1</a:t>
+              <a:t>Editorial error -1</a:t>
             </a:r>
           </a:p>
         </p:txBody>
@@ -2658,7 +2658,7 @@
                   <a:srgbClr val="15375F"/>
                 </a:solidFill>
               </a:rPr>
-              <a:t>2月</a:t>
+              <a:t>2month</a:t>
             </a:r>
           </a:p>
         </p:txBody>
@@ -3028,7 +3028,7 @@
                   <a:srgbClr val="E8872D"/>
                 </a:solidFill>
               </a:rPr>
-              <a:t>编差 -2</a:t>
+              <a:t>Editorial error -2</a:t>
             </a:r>
           </a:p>
         </p:txBody>
@@ -3109,7 +3109,7 @@
                   <a:srgbClr val="15375F"/>
                 </a:solidFill>
               </a:rPr>
-              <a:t>3月</a:t>
+              <a:t>3month</a:t>
             </a:r>
           </a:p>
         </p:txBody>
@@ -3479,7 +3479,7 @@
                   <a:srgbClr val="E8872D"/>
                 </a:solidFill>
               </a:rPr>
-              <a:t>编差 -3</a:t>
+              <a:t>Editorial error -3</a:t>
             </a:r>
           </a:p>
         </p:txBody>
@@ -3560,7 +3560,7 @@
                   <a:srgbClr val="15375F"/>
                 </a:solidFill>
               </a:rPr>
-              <a:t>4月</a:t>
+              <a:t>4month</a:t>
             </a:r>
           </a:p>
         </p:txBody>
@@ -3930,7 +3930,7 @@
                   <a:srgbClr val="E8872D"/>
                 </a:solidFill>
               </a:rPr>
-              <a:t>编差 -4</a:t>
+              <a:t>Editorial error -4</a:t>
             </a:r>
           </a:p>
         </p:txBody>
@@ -4011,7 +4011,7 @@
                   <a:srgbClr val="15375F"/>
                 </a:solidFill>
               </a:rPr>
-              <a:t>5月</a:t>
+              <a:t>5month</a:t>
             </a:r>
           </a:p>
         </p:txBody>
@@ -4381,7 +4381,7 @@
                   <a:srgbClr val="E8872D"/>
                 </a:solidFill>
               </a:rPr>
-              <a:t>编差 -5</a:t>
+              <a:t>Editorial error -5</a:t>
             </a:r>
           </a:p>
         </p:txBody>
@@ -4462,7 +4462,7 @@
                   <a:srgbClr val="15375F"/>
                 </a:solidFill>
               </a:rPr>
-              <a:t>6月</a:t>
+              <a:t>6month</a:t>
             </a:r>
           </a:p>
         </p:txBody>
@@ -4832,7 +4832,7 @@
                   <a:srgbClr val="E8872D"/>
                 </a:solidFill>
               </a:rPr>
-              <a:t>编差 -6</a:t>
+              <a:t>Editorial error -6</a:t>
             </a:r>
           </a:p>
         </p:txBody>
@@ -4913,7 +4913,7 @@
                   <a:srgbClr val="15375F"/>
                 </a:solidFill>
               </a:rPr>
-              <a:t>7月</a:t>
+              <a:t>7month</a:t>
             </a:r>
           </a:p>
         </p:txBody>
@@ -5283,7 +5283,7 @@
                   <a:srgbClr val="E8872D"/>
                 </a:solidFill>
               </a:rPr>
-              <a:t>编差 -6</a:t>
+              <a:t>Editorial error -6</a:t>
             </a:r>
           </a:p>
         </p:txBody>
@@ -5364,7 +5364,7 @@
                   <a:srgbClr val="15375F"/>
                 </a:solidFill>
               </a:rPr>
-              <a:t>8月</a:t>
+              <a:t>8month</a:t>
             </a:r>
           </a:p>
         </p:txBody>
@@ -5734,7 +5734,7 @@
                   <a:srgbClr val="E8872D"/>
                 </a:solidFill>
               </a:rPr>
-              <a:t>编差 -6</a:t>
+              <a:t>Editorial error -6</a:t>
             </a:r>
           </a:p>
         </p:txBody>
@@ -5815,7 +5815,7 @@
                   <a:srgbClr val="15375F"/>
                 </a:solidFill>
               </a:rPr>
-              <a:t>9月</a:t>
+              <a:t>9month</a:t>
             </a:r>
           </a:p>
         </p:txBody>
@@ -6185,7 +6185,7 @@
                   <a:srgbClr val="E8872D"/>
                 </a:solidFill>
               </a:rPr>
-              <a:t>编差 -6</a:t>
+              <a:t>Editorial error -6</a:t>
             </a:r>
           </a:p>
         </p:txBody>
@@ -6266,7 +6266,7 @@
                   <a:srgbClr val="15375F"/>
                 </a:solidFill>
               </a:rPr>
-              <a:t>10月</a:t>
+              <a:t>10month</a:t>
             </a:r>
           </a:p>
         </p:txBody>
@@ -6636,7 +6636,7 @@
                   <a:srgbClr val="E8872D"/>
                 </a:solidFill>
               </a:rPr>
-              <a:t>编差 -6</a:t>
+              <a:t>Editorial error -6</a:t>
             </a:r>
           </a:p>
         </p:txBody>
@@ -6717,7 +6717,7 @@
                   <a:srgbClr val="15375F"/>
                 </a:solidFill>
               </a:rPr>
-              <a:t>11月</a:t>
+              <a:t>11month</a:t>
             </a:r>
           </a:p>
         </p:txBody>
@@ -7087,7 +7087,7 @@
                   <a:srgbClr val="E8872D"/>
                 </a:solidFill>
               </a:rPr>
-              <a:t>编差 -6</a:t>
+              <a:t>Editorial error -6</a:t>
             </a:r>
           </a:p>
         </p:txBody>
@@ -7168,7 +7168,7 @@
                   <a:srgbClr val="15375F"/>
                 </a:solidFill>
               </a:rPr>
-              <a:t>12月</a:t>
+              <a:t>12month</a:t>
             </a:r>
           </a:p>
         </p:txBody>
@@ -7538,14 +7538,14 @@
                   <a:srgbClr val="E8872D"/>
                 </a:solidFill>
               </a:rPr>
-              <a:t>编差 -6</a:t>
-            </a:r>
-          </a:p>
-        </p:txBody>
-      </p:sp>
-      <p:sp>
-        <p:nvSpPr>
-          <p:cNvPr id="140" name="管理洞察-rail">
+              <a:t>Editorial error -6</a:t>
+            </a:r>
+          </a:p>
+        </p:txBody>
+      </p:sp>
+      <p:sp>
+        <p:nvSpPr>
+          <p:cNvPr id="140" name="management insights-rail">
             <a:extLst xmlns:a="http://schemas.openxmlformats.org/drawingml/2006/main">
               <a:ext uri="{FF2B5EF4-FFF2-40B4-BE49-F238E27FC236}">
                 <a16:creationId xmlns:a16="http://schemas.microsoft.com/office/drawing/2014/main" id="{F62431AD-A3F4-4776-955D-050FD3262CC8}"/>
@@ -7580,7 +7580,7 @@
       </p:sp>
       <p:sp>
         <p:nvSpPr>
-          <p:cNvPr id="141" name="管理洞察-title">
+          <p:cNvPr id="141" name="management insights-title">
             <a:extLst xmlns:a="http://schemas.openxmlformats.org/drawingml/2006/main">
               <a:ext uri="{FF2B5EF4-FFF2-40B4-BE49-F238E27FC236}">
                 <a16:creationId xmlns:a16="http://schemas.microsoft.com/office/drawing/2014/main" id="{C09F322B-0102-4C3A-95DA-F103827E1119}"/>
@@ -7623,14 +7623,14 @@
                   <a:srgbClr val="15375F"/>
                 </a:solidFill>
               </a:rPr>
-              <a:t>管理洞察</a:t>
-            </a:r>
-          </a:p>
-        </p:txBody>
-      </p:sp>
-      <p:sp>
-        <p:nvSpPr>
-          <p:cNvPr id="142" name="管理洞察-1">
+              <a:t>management insights</a:t>
+            </a:r>
+          </a:p>
+        </p:txBody>
+      </p:sp>
+      <p:sp>
+        <p:nvSpPr>
+          <p:cNvPr id="142" name="management insights-1">
             <a:extLst xmlns:a="http://schemas.openxmlformats.org/drawingml/2006/main">
               <a:ext uri="{FF2B5EF4-FFF2-40B4-BE49-F238E27FC236}">
                 <a16:creationId xmlns:a16="http://schemas.microsoft.com/office/drawing/2014/main" id="{151AD495-49D0-408E-AD9D-FE319FE5AC76}"/>
@@ -7679,14 +7679,14 @@
                   <a:srgbClr val="172033"/>
                 </a:solidFill>
               </a:rPr>
-              <a:t>1  招聘总量的 81% 用于填补离职缺口</a:t>
-            </a:r>
-          </a:p>
-        </p:txBody>
-      </p:sp>
-      <p:sp>
-        <p:nvSpPr>
-          <p:cNvPr id="143" name="管理洞察-2">
+              <a:t>1  of total recruitment 81% Used to fill separation gaps</a:t>
+            </a:r>
+          </a:p>
+        </p:txBody>
+      </p:sp>
+      <p:sp>
+        <p:nvSpPr>
+          <p:cNvPr id="143" name="management insights-2">
             <a:extLst xmlns:a="http://schemas.openxmlformats.org/drawingml/2006/main">
               <a:ext uri="{FF2B5EF4-FFF2-40B4-BE49-F238E27FC236}">
                 <a16:creationId xmlns:a16="http://schemas.microsoft.com/office/drawing/2014/main" id="{63E9B2E2-33DD-45B7-8BD4-0543A9B11C89}"/>
@@ -7735,14 +7735,14 @@
                   <a:srgbClr val="172033"/>
                 </a:solidFill>
               </a:rPr>
-              <a:t>2  3 月、9 月和 11 月离职出现峰值</a:t>
-            </a:r>
-          </a:p>
-        </p:txBody>
-      </p:sp>
-      <p:sp>
-        <p:nvSpPr>
-          <p:cNvPr id="144" name="管理洞察-3">
+              <a:t>2  3 month,9 Yuehe 11 Monthly turnover peaks</a:t>
+            </a:r>
+          </a:p>
+        </p:txBody>
+      </p:sp>
+      <p:sp>
+        <p:nvSpPr>
+          <p:cNvPr id="144" name="management insights-3">
             <a:extLst xmlns:a="http://schemas.openxmlformats.org/drawingml/2006/main">
               <a:ext uri="{FF2B5EF4-FFF2-40B4-BE49-F238E27FC236}">
                 <a16:creationId xmlns:a16="http://schemas.microsoft.com/office/drawing/2014/main" id="{E2CE9618-B44A-404C-A77F-637BCC4439B4}"/>
@@ -7791,7 +7791,7 @@
                   <a:srgbClr val="172033"/>
                 </a:solidFill>
               </a:rPr>
-              <a:t>3  编制连续低于预算，增量被流失反复消耗</a:t>
+              <a:t>3  The preparation is continuously below the budget, and the increment is repeatedly consumed by losses.</a:t>
             </a:r>
           </a:p>
         </p:txBody>
@@ -7847,7 +7847,7 @@
                   <a:srgbClr val="15375F"/>
                 </a:solidFill>
               </a:rPr>
-              <a:t>净增 42 人对应招聘投入 336 万，单位净增成本 8.0 万元/人</a:t>
+              <a:t>net increase 42 People correspond to recruitment investment 336 Ten thousand, net incremental cost per unit 8.0 Ten thousand yuan/people</a:t>
             </a:r>
           </a:p>
         </p:txBody>
